--- a/e2e/fixtures/pattern-outline.pptx
+++ b/e2e/fixtures/pattern-outline.pptx
@@ -189,7 +189,7 @@
           <a:solidFill>
             <a:srgbClr val="FFFFFF"/>
           </a:solidFill>
-          <a:ln w="76200">
+          <a:ln w="76200" algn="in">
             <a:solidFill>
               <a:srgbClr val="00B050"/>
             </a:solidFill>
